--- a/ЛР_5_Бикбавов_Кручинин.pptx
+++ b/ЛР_5_Бикбавов_Кручинин.pptx
@@ -5,22 +5,18 @@
     <p:sldMasterId id="2147483648" r:id="rId1"/>
   </p:sldMasterIdLst>
   <p:notesMasterIdLst>
-    <p:notesMasterId r:id="rId12"/>
+    <p:notesMasterId r:id="rId8"/>
   </p:notesMasterIdLst>
   <p:handoutMasterIdLst>
-    <p:handoutMasterId r:id="rId13"/>
+    <p:handoutMasterId r:id="rId9"/>
   </p:handoutMasterIdLst>
   <p:sldIdLst>
     <p:sldId id="256" r:id="rId2"/>
     <p:sldId id="257" r:id="rId3"/>
     <p:sldId id="259" r:id="rId4"/>
-    <p:sldId id="258" r:id="rId5"/>
-    <p:sldId id="260" r:id="rId6"/>
-    <p:sldId id="266" r:id="rId7"/>
-    <p:sldId id="263" r:id="rId8"/>
-    <p:sldId id="264" r:id="rId9"/>
-    <p:sldId id="267" r:id="rId10"/>
-    <p:sldId id="268" r:id="rId11"/>
+    <p:sldId id="263" r:id="rId5"/>
+    <p:sldId id="267" r:id="rId6"/>
+    <p:sldId id="268" r:id="rId7"/>
   </p:sldIdLst>
   <p:sldSz cx="12192000" cy="6858000"/>
   <p:notesSz cx="7104063" cy="10234613"/>
@@ -220,7 +216,7 @@
           <a:p>
             <a:fld id="{0F9B84EA-7D68-4D60-9CB1-D50884785D1C}" type="datetimeFigureOut">
               <a:rPr lang="en-US" smtClean="0"/>
-              <a:t>6/8/2026</a:t>
+              <a:t>6/9/2026</a:t>
             </a:fld>
             <a:endParaRPr lang="en-US"/>
           </a:p>
@@ -385,7 +381,7 @@
           <a:p>
             <a:fld id="{D6C8D182-E4C8-4120-9249-FC9774456FFA}" type="datetimeFigureOut">
               <a:rPr lang="en-US" smtClean="0"/>
-              <a:t>6/8/2026</a:t>
+              <a:t>6/9/2026</a:t>
             </a:fld>
             <a:endParaRPr lang="en-US"/>
           </a:p>
@@ -720,7 +716,7 @@
           <a:p>
             <a:fld id="{760FBDFE-C587-4B4C-A407-44438C67B59E}" type="datetimeFigureOut">
               <a:rPr lang="en-US" smtClean="0"/>
-              <a:t>6/8/2026</a:t>
+              <a:t>6/9/2026</a:t>
             </a:fld>
             <a:endParaRPr lang="en-US"/>
           </a:p>
@@ -886,7 +882,7 @@
           <a:p>
             <a:fld id="{760FBDFE-C587-4B4C-A407-44438C67B59E}" type="datetimeFigureOut">
               <a:rPr lang="en-US" smtClean="0"/>
-              <a:t>6/8/2026</a:t>
+              <a:t>6/9/2026</a:t>
             </a:fld>
             <a:endParaRPr lang="en-US"/>
           </a:p>
@@ -1202,7 +1198,7 @@
           <a:p>
             <a:fld id="{760FBDFE-C587-4B4C-A407-44438C67B59E}" type="datetimeFigureOut">
               <a:rPr lang="en-US" smtClean="0"/>
-              <a:t>6/8/2026</a:t>
+              <a:t>6/9/2026</a:t>
             </a:fld>
             <a:endParaRPr lang="en-US"/>
           </a:p>
@@ -1450,7 +1446,7 @@
           <a:p>
             <a:fld id="{760FBDFE-C587-4B4C-A407-44438C67B59E}" type="datetimeFigureOut">
               <a:rPr lang="en-US" smtClean="0"/>
-              <a:t>6/8/2026</a:t>
+              <a:t>6/9/2026</a:t>
             </a:fld>
             <a:endParaRPr lang="en-US"/>
           </a:p>
@@ -1851,7 +1847,7 @@
           <a:p>
             <a:fld id="{760FBDFE-C587-4B4C-A407-44438C67B59E}" type="datetimeFigureOut">
               <a:rPr lang="en-US" smtClean="0"/>
-              <a:t>6/8/2026</a:t>
+              <a:t>6/9/2026</a:t>
             </a:fld>
             <a:endParaRPr lang="en-US"/>
           </a:p>
@@ -2226,7 +2222,7 @@
           <a:p>
             <a:fld id="{760FBDFE-C587-4B4C-A407-44438C67B59E}" type="datetimeFigureOut">
               <a:rPr lang="en-US" smtClean="0"/>
-              <a:t>6/8/2026</a:t>
+              <a:t>6/9/2026</a:t>
             </a:fld>
             <a:endParaRPr lang="en-US"/>
           </a:p>
@@ -2353,7 +2349,7 @@
           <a:p>
             <a:fld id="{760FBDFE-C587-4B4C-A407-44438C67B59E}" type="datetimeFigureOut">
               <a:rPr lang="en-US" smtClean="0"/>
-              <a:t>6/8/2026</a:t>
+              <a:t>6/9/2026</a:t>
             </a:fld>
             <a:endParaRPr lang="en-US"/>
           </a:p>
@@ -2443,7 +2439,7 @@
           <a:p>
             <a:fld id="{760FBDFE-C587-4B4C-A407-44438C67B59E}" type="datetimeFigureOut">
               <a:rPr lang="en-US" smtClean="0"/>
-              <a:t>6/8/2026</a:t>
+              <a:t>6/9/2026</a:t>
             </a:fld>
             <a:endParaRPr lang="en-US"/>
           </a:p>
@@ -2701,7 +2697,7 @@
           <a:p>
             <a:fld id="{9EFD9D74-47D9-4702-A33C-335B63B48DBF}" type="datetimeFigureOut">
               <a:rPr lang="en-US" smtClean="0"/>
-              <a:t>6/8/2026</a:t>
+              <a:t>6/9/2026</a:t>
             </a:fld>
             <a:endParaRPr lang="en-US" dirty="0"/>
           </a:p>
@@ -2880,7 +2876,7 @@
           <a:p>
             <a:fld id="{760FBDFE-C587-4B4C-A407-44438C67B59E}" type="datetimeFigureOut">
               <a:rPr lang="en-US" smtClean="0"/>
-              <a:t>6/8/2026</a:t>
+              <a:t>6/9/2026</a:t>
             </a:fld>
             <a:endParaRPr lang="en-US"/>
           </a:p>
@@ -3106,7 +3102,7 @@
           <a:p>
             <a:fld id="{760FBDFE-C587-4B4C-A407-44438C67B59E}" type="datetimeFigureOut">
               <a:rPr lang="en-US" smtClean="0"/>
-              <a:t>6/8/2026</a:t>
+              <a:t>6/9/2026</a:t>
             </a:fld>
             <a:endParaRPr lang="en-US" dirty="0"/>
           </a:p>
@@ -3655,183 +3651,6 @@
 </p:sld>
 </file>
 
-<file path=ppt/slides/slide10.xml><?xml version="1.0" encoding="utf-8"?>
-<p:sld xmlns:a="http://schemas.openxmlformats.org/drawingml/2006/main" xmlns:r="http://schemas.openxmlformats.org/officeDocument/2006/relationships" xmlns:p="http://schemas.openxmlformats.org/presentationml/2006/main">
-  <p:cSld>
-    <p:spTree>
-      <p:nvGrpSpPr>
-        <p:cNvPr id="1" name=""/>
-        <p:cNvGrpSpPr/>
-        <p:nvPr/>
-      </p:nvGrpSpPr>
-      <p:grpSpPr>
-        <a:xfrm>
-          <a:off x="0" y="0"/>
-          <a:ext cx="0" cy="0"/>
-          <a:chOff x="0" y="0"/>
-          <a:chExt cx="0" cy="0"/>
-        </a:xfrm>
-      </p:grpSpPr>
-      <p:sp>
-        <p:nvSpPr>
-          <p:cNvPr id="2" name="Заголовок 1"/>
-          <p:cNvSpPr>
-            <a:spLocks noGrp="1"/>
-          </p:cNvSpPr>
-          <p:nvPr>
-            <p:ph type="ctrTitle"/>
-          </p:nvPr>
-        </p:nvSpPr>
-        <p:spPr>
-          <a:xfrm>
-            <a:off x="0" y="0"/>
-            <a:ext cx="5972175" cy="1156970"/>
-          </a:xfrm>
-        </p:spPr>
-        <p:txBody>
-          <a:bodyPr>
-            <a:normAutofit fontScale="90000"/>
-          </a:bodyPr>
-          <a:lstStyle/>
-          <a:p>
-            <a:r>
-              <a:rPr lang="ru-RU" sz="3200" b="1" dirty="0"/>
-              <a:t>Пример работы восстановленного кода программы </a:t>
-            </a:r>
-          </a:p>
-        </p:txBody>
-      </p:sp>
-      <p:sp>
-        <p:nvSpPr>
-          <p:cNvPr id="6" name="Номер слайда 5"/>
-          <p:cNvSpPr>
-            <a:spLocks noGrp="1"/>
-          </p:cNvSpPr>
-          <p:nvPr>
-            <p:ph type="sldNum" sz="quarter" idx="12"/>
-          </p:nvPr>
-        </p:nvSpPr>
-        <p:spPr/>
-        <p:txBody>
-          <a:bodyPr/>
-          <a:lstStyle/>
-          <a:p>
-            <a:fld id="{B19B0651-EE4F-4900-A07F-96A6BFA9D0F0}" type="slidenum">
-              <a:rPr lang="ru-RU" smtClean="0"/>
-              <a:t>10</a:t>
-            </a:fld>
-            <a:endParaRPr lang="ru-RU" dirty="0"/>
-          </a:p>
-        </p:txBody>
-      </p:sp>
-      <p:pic>
-        <p:nvPicPr>
-          <p:cNvPr id="3" name="Изображение 2"/>
-          <p:cNvPicPr>
-            <a:picLocks noChangeAspect="1"/>
-          </p:cNvPicPr>
-          <p:nvPr/>
-        </p:nvPicPr>
-        <p:blipFill>
-          <a:blip r:embed="rId3"/>
-          <a:stretch>
-            <a:fillRect/>
-          </a:stretch>
-        </p:blipFill>
-        <p:spPr>
-          <a:xfrm>
-            <a:off x="4498340" y="2429510"/>
-            <a:ext cx="3195320" cy="1998345"/>
-          </a:xfrm>
-          <a:prstGeom prst="rect">
-            <a:avLst/>
-          </a:prstGeom>
-        </p:spPr>
-      </p:pic>
-      <p:sp>
-        <p:nvSpPr>
-          <p:cNvPr id="4" name="TextBox 7"/>
-          <p:cNvSpPr txBox="1"/>
-          <p:nvPr>
-            <p:custDataLst>
-              <p:tags r:id="rId1"/>
-            </p:custDataLst>
-          </p:nvPr>
-        </p:nvSpPr>
-        <p:spPr>
-          <a:xfrm>
-            <a:off x="3790631" y="4667552"/>
-            <a:ext cx="4610735" cy="654685"/>
-          </a:xfrm>
-          <a:prstGeom prst="rect">
-            <a:avLst/>
-          </a:prstGeom>
-          <a:noFill/>
-        </p:spPr>
-        <p:txBody>
-          <a:bodyPr wrap="square" rtlCol="0">
-            <a:noAutofit/>
-          </a:bodyPr>
-          <a:lstStyle/>
-          <a:p>
-            <a:pPr algn="ctr"/>
-            <a:r>
-              <a:rPr lang="ru-RU" dirty="0"/>
-              <a:t>Запуск</a:t>
-            </a:r>
-            <a:r>
-              <a:rPr lang="en-US" dirty="0"/>
-              <a:t> </a:t>
-            </a:r>
-            <a:r>
-              <a:rPr lang="ru-RU" dirty="0" err="1"/>
-              <a:t>востановленного</a:t>
-            </a:r>
-            <a:r>
-              <a:rPr lang="ru-RU" dirty="0"/>
-              <a:t> кода</a:t>
-            </a:r>
-          </a:p>
-        </p:txBody>
-      </p:sp>
-      <p:pic>
-        <p:nvPicPr>
-          <p:cNvPr id="7" name="Рисунок 6">
-            <a:extLst>
-              <a:ext uri="{FF2B5EF4-FFF2-40B4-BE49-F238E27FC236}">
-                <a16:creationId xmlns:a16="http://schemas.microsoft.com/office/drawing/2014/main" id="{26A734D2-5905-FA9E-9B1B-50141942CF57}"/>
-              </a:ext>
-            </a:extLst>
-          </p:cNvPr>
-          <p:cNvPicPr>
-            <a:picLocks noChangeAspect="1"/>
-          </p:cNvPicPr>
-          <p:nvPr/>
-        </p:nvPicPr>
-        <p:blipFill>
-          <a:blip r:embed="rId4"/>
-          <a:stretch>
-            <a:fillRect/>
-          </a:stretch>
-        </p:blipFill>
-        <p:spPr>
-          <a:xfrm>
-            <a:off x="4519392" y="2400156"/>
-            <a:ext cx="3153215" cy="2057687"/>
-          </a:xfrm>
-          <a:prstGeom prst="rect">
-            <a:avLst/>
-          </a:prstGeom>
-        </p:spPr>
-      </p:pic>
-    </p:spTree>
-  </p:cSld>
-  <p:clrMapOvr>
-    <a:masterClrMapping/>
-  </p:clrMapOvr>
-</p:sld>
-</file>
-
 <file path=ppt/slides/slide2.xml><?xml version="1.0" encoding="utf-8"?>
 <p:sld xmlns:a="http://schemas.openxmlformats.org/drawingml/2006/main" xmlns:r="http://schemas.openxmlformats.org/officeDocument/2006/relationships" xmlns:p="http://schemas.openxmlformats.org/presentationml/2006/main">
   <p:cSld>
@@ -4062,14 +3881,33 @@
           <a:p>
             <a:r>
               <a:rPr lang="ru-RU" dirty="0"/>
-              <a:t>Основные функции программы</a:t>
-            </a:r>
+              <a:t>При помощи </a:t>
+            </a:r>
+            <a:r>
+              <a:rPr lang="en-US" dirty="0"/>
+              <a:t>IDA Pro </a:t>
+            </a:r>
+            <a:r>
+              <a:rPr lang="ru-RU" dirty="0"/>
+              <a:t>обнаружили, что код написан на </a:t>
+            </a:r>
+            <a:r>
+              <a:rPr lang="en-US" dirty="0"/>
+              <a:t>python</a:t>
+            </a:r>
+            <a:endParaRPr lang="ru-RU" dirty="0"/>
           </a:p>
         </p:txBody>
       </p:sp>
       <p:pic>
         <p:nvPicPr>
-          <p:cNvPr id="3" name="Изображение 2"/>
+          <p:cNvPr id="7" name="Рисунок 6">
+            <a:extLst>
+              <a:ext uri="{FF2B5EF4-FFF2-40B4-BE49-F238E27FC236}">
+                <a16:creationId xmlns:a16="http://schemas.microsoft.com/office/drawing/2014/main" id="{62C63604-B939-254B-C69A-000673F974B2}"/>
+              </a:ext>
+            </a:extLst>
+          </p:cNvPr>
           <p:cNvPicPr>
             <a:picLocks noChangeAspect="1"/>
           </p:cNvPicPr>
@@ -4083,38 +3921,8 @@
         </p:blipFill>
         <p:spPr>
           <a:xfrm>
-            <a:off x="4371975" y="2803525"/>
-            <a:ext cx="3448050" cy="2400300"/>
-          </a:xfrm>
-          <a:prstGeom prst="rect">
-            <a:avLst/>
-          </a:prstGeom>
-        </p:spPr>
-      </p:pic>
-      <p:pic>
-        <p:nvPicPr>
-          <p:cNvPr id="5" name="Рисунок 4">
-            <a:extLst>
-              <a:ext uri="{FF2B5EF4-FFF2-40B4-BE49-F238E27FC236}">
-                <a16:creationId xmlns:a16="http://schemas.microsoft.com/office/drawing/2014/main" id="{2B96C23E-9F32-AC1C-3B17-6CBAF9B89C8F}"/>
-              </a:ext>
-            </a:extLst>
-          </p:cNvPr>
-          <p:cNvPicPr>
-            <a:picLocks noChangeAspect="1"/>
-          </p:cNvPicPr>
-          <p:nvPr/>
-        </p:nvPicPr>
-        <p:blipFill>
-          <a:blip r:embed="rId3"/>
-          <a:stretch>
-            <a:fillRect/>
-          </a:stretch>
-        </p:blipFill>
-        <p:spPr>
-          <a:xfrm>
-            <a:off x="4238366" y="1415861"/>
-            <a:ext cx="3715268" cy="4229690"/>
+            <a:off x="1509072" y="3128920"/>
+            <a:ext cx="9173855" cy="600159"/>
           </a:xfrm>
           <a:prstGeom prst="rect">
             <a:avLst/>
@@ -4158,8 +3966,8 @@
         </p:nvSpPr>
         <p:spPr>
           <a:xfrm>
-            <a:off x="0" y="-124069"/>
-            <a:ext cx="4048125" cy="1015375"/>
+            <a:off x="0" y="-63189"/>
+            <a:ext cx="12064753" cy="1015375"/>
           </a:xfrm>
         </p:spPr>
         <p:txBody>
@@ -4170,7 +3978,23 @@
           <a:p>
             <a:r>
               <a:rPr lang="ru-RU" sz="3200" b="1" dirty="0"/>
-              <a:t>Дизассемблирование </a:t>
+              <a:t>Распакованный</a:t>
+            </a:r>
+            <a:r>
+              <a:rPr lang="en-US" sz="3200" b="1" dirty="0"/>
+              <a:t> exe </a:t>
+            </a:r>
+            <a:r>
+              <a:rPr lang="ru-RU" sz="3200" b="1" dirty="0"/>
+              <a:t>через </a:t>
+            </a:r>
+            <a:r>
+              <a:rPr lang="en-US" sz="3200" b="1" dirty="0" err="1"/>
+              <a:t>pyinstxtractor</a:t>
+            </a:r>
+            <a:r>
+              <a:rPr lang="ru-RU" sz="3200" b="1" dirty="0"/>
+              <a:t> </a:t>
             </a:r>
           </a:p>
         </p:txBody>
@@ -4202,12 +4026,16 @@
         <p:nvSpPr>
           <p:cNvPr id="8" name="TextBox 7"/>
           <p:cNvSpPr txBox="1"/>
-          <p:nvPr/>
+          <p:nvPr>
+            <p:custDataLst>
+              <p:tags r:id="rId1"/>
+            </p:custDataLst>
+          </p:nvPr>
         </p:nvSpPr>
         <p:spPr>
           <a:xfrm>
-            <a:off x="4363573" y="5814935"/>
-            <a:ext cx="3811270" cy="387350"/>
+            <a:off x="3886200" y="5969000"/>
+            <a:ext cx="4419600" cy="444500"/>
           </a:xfrm>
           <a:prstGeom prst="rect">
             <a:avLst/>
@@ -4223,48 +4051,18 @@
             <a:pPr algn="ctr"/>
             <a:r>
               <a:rPr lang="ru-RU" dirty="0"/>
-              <a:t>Дизассемблированный </a:t>
-            </a:r>
-            <a:r>
-              <a:rPr lang="en-US" dirty="0"/>
-              <a:t>main</a:t>
-            </a:r>
-          </a:p>
-        </p:txBody>
-      </p:sp>
-      <p:sp>
-        <p:nvSpPr>
-          <p:cNvPr id="7" name="TextBox 7"/>
-          <p:cNvSpPr txBox="1"/>
-          <p:nvPr/>
-        </p:nvSpPr>
-        <p:spPr>
-          <a:xfrm>
-            <a:off x="7016750" y="5226050"/>
-            <a:ext cx="3811270" cy="387350"/>
-          </a:xfrm>
-          <a:prstGeom prst="rect">
-            <a:avLst/>
-          </a:prstGeom>
-          <a:noFill/>
-        </p:spPr>
-        <p:txBody>
-          <a:bodyPr wrap="square" rtlCol="0">
-            <a:noAutofit/>
-          </a:bodyPr>
-          <a:lstStyle/>
-          <a:p>
-            <a:pPr algn="ctr"/>
+              <a:t> </a:t>
+            </a:r>
             <a:endParaRPr lang="en-US" dirty="0"/>
           </a:p>
         </p:txBody>
       </p:sp>
       <p:pic>
         <p:nvPicPr>
-          <p:cNvPr id="9" name="Рисунок 8">
+          <p:cNvPr id="4" name="Рисунок 3">
             <a:extLst>
               <a:ext uri="{FF2B5EF4-FFF2-40B4-BE49-F238E27FC236}">
-                <a16:creationId xmlns:a16="http://schemas.microsoft.com/office/drawing/2014/main" id="{41691224-D7F8-0D69-0105-06216AFB9F88}"/>
+                <a16:creationId xmlns:a16="http://schemas.microsoft.com/office/drawing/2014/main" id="{A2FB891E-2602-4CA2-9DE5-7C48F1C9D84A}"/>
               </a:ext>
             </a:extLst>
           </p:cNvPr>
@@ -4274,15 +4072,21 @@
           <p:nvPr/>
         </p:nvPicPr>
         <p:blipFill>
-          <a:blip r:embed="rId2"/>
+          <a:blip r:embed="rId3">
+            <a:extLst>
+              <a:ext uri="{28A0092B-C50C-407E-A947-70E740481C1C}">
+                <a14:useLocalDpi xmlns:a14="http://schemas.microsoft.com/office/drawing/2010/main" val="0"/>
+              </a:ext>
+            </a:extLst>
+          </a:blip>
           <a:stretch>
             <a:fillRect/>
           </a:stretch>
         </p:blipFill>
         <p:spPr>
           <a:xfrm>
-            <a:off x="2773045" y="891306"/>
-            <a:ext cx="6992326" cy="4829849"/>
+            <a:off x="2024062" y="1277222"/>
+            <a:ext cx="8842814" cy="5136278"/>
           </a:xfrm>
           <a:prstGeom prst="rect">
             <a:avLst/>
@@ -4326,19 +4130,34 @@
         </p:nvSpPr>
         <p:spPr>
           <a:xfrm>
-            <a:off x="0" y="-124069"/>
-            <a:ext cx="4048125" cy="1015375"/>
+            <a:off x="-220345" y="154061"/>
+            <a:ext cx="4123424" cy="1594840"/>
           </a:xfrm>
         </p:spPr>
         <p:txBody>
           <a:bodyPr>
-            <a:normAutofit/>
+            <a:normAutofit fontScale="90000"/>
           </a:bodyPr>
           <a:lstStyle/>
           <a:p>
             <a:r>
               <a:rPr lang="ru-RU" sz="3200" b="1" dirty="0"/>
-              <a:t>Дизассемблирование </a:t>
+              <a:t>Восстановленный код</a:t>
+            </a:r>
+            <a:br>
+              <a:rPr lang="ru-RU" sz="3200" b="1" dirty="0"/>
+            </a:br>
+            <a:r>
+              <a:rPr lang="ru-RU" sz="3200" b="1" dirty="0"/>
+              <a:t>программы через </a:t>
+            </a:r>
+            <a:r>
+              <a:rPr lang="en-US" sz="3200" b="1" dirty="0"/>
+              <a:t>decompyle3</a:t>
+            </a:r>
+            <a:r>
+              <a:rPr lang="ru-RU" sz="3200" b="1" dirty="0"/>
+              <a:t> </a:t>
             </a:r>
           </a:p>
         </p:txBody>
@@ -4368,7 +4187,7 @@
       </p:sp>
       <p:sp>
         <p:nvSpPr>
-          <p:cNvPr id="8" name="TextBox 7"/>
+          <p:cNvPr id="11" name="TextBox 7"/>
           <p:cNvSpPr txBox="1"/>
           <p:nvPr>
             <p:custDataLst>
@@ -4378,8 +4197,8 @@
         </p:nvSpPr>
         <p:spPr>
           <a:xfrm>
-            <a:off x="3886200" y="5969000"/>
-            <a:ext cx="4419600" cy="444500"/>
+            <a:off x="637540" y="3274060"/>
+            <a:ext cx="4610735" cy="654685"/>
           </a:xfrm>
           <a:prstGeom prst="rect">
             <a:avLst/>
@@ -4395,13 +4214,15 @@
             <a:pPr algn="ctr"/>
             <a:r>
               <a:rPr lang="ru-RU" dirty="0"/>
-              <a:t> Дизассемблирование функции </a:t>
-            </a:r>
-            <a:r>
-              <a:rPr lang="en-US" dirty="0" err="1"/>
-              <a:t>swprintf</a:t>
-            </a:r>
-            <a:endParaRPr lang="en-US" altLang="ru-RU" dirty="0"/>
+              <a:t> Восстановленный </a:t>
+            </a:r>
+          </a:p>
+          <a:p>
+            <a:pPr algn="ctr"/>
+            <a:r>
+              <a:rPr lang="ru-RU" dirty="0"/>
+              <a:t>изначальный код</a:t>
+            </a:r>
           </a:p>
         </p:txBody>
       </p:sp>
@@ -4410,7 +4231,7 @@
           <p:cNvPr id="4" name="Рисунок 3">
             <a:extLst>
               <a:ext uri="{FF2B5EF4-FFF2-40B4-BE49-F238E27FC236}">
-                <a16:creationId xmlns:a16="http://schemas.microsoft.com/office/drawing/2014/main" id="{ED853CD4-8581-5B76-B891-3BD440E142C6}"/>
+                <a16:creationId xmlns:a16="http://schemas.microsoft.com/office/drawing/2014/main" id="{D8FC6718-78F8-F466-A9C9-807CD5EB947C}"/>
               </a:ext>
             </a:extLst>
           </p:cNvPr>
@@ -4427,8 +4248,8 @@
         </p:blipFill>
         <p:spPr>
           <a:xfrm>
-            <a:off x="3234808" y="966499"/>
-            <a:ext cx="6930009" cy="4925001"/>
+            <a:off x="4882015" y="213064"/>
+            <a:ext cx="4123424" cy="6431872"/>
           </a:xfrm>
           <a:prstGeom prst="rect">
             <a:avLst/>
@@ -4472,19 +4293,19 @@
         </p:nvSpPr>
         <p:spPr>
           <a:xfrm>
-            <a:off x="-602615" y="-124069"/>
-            <a:ext cx="4048125" cy="1015375"/>
+            <a:off x="0" y="0"/>
+            <a:ext cx="5972175" cy="1156970"/>
           </a:xfrm>
         </p:spPr>
         <p:txBody>
           <a:bodyPr>
-            <a:normAutofit/>
+            <a:normAutofit fontScale="90000"/>
           </a:bodyPr>
           <a:lstStyle/>
           <a:p>
             <a:r>
               <a:rPr lang="ru-RU" sz="3200" b="1" dirty="0"/>
-              <a:t>Дамп памяти </a:t>
+              <a:t>Пример работы восстановленного кода программы </a:t>
             </a:r>
           </a:p>
         </p:txBody>
@@ -4512,57 +4333,9 @@
           </a:p>
         </p:txBody>
       </p:sp>
-      <p:sp>
-        <p:nvSpPr>
-          <p:cNvPr id="11" name="TextBox 7"/>
-          <p:cNvSpPr txBox="1"/>
-          <p:nvPr>
-            <p:custDataLst>
-              <p:tags r:id="rId1"/>
-            </p:custDataLst>
-          </p:nvPr>
-        </p:nvSpPr>
-        <p:spPr>
-          <a:xfrm>
-            <a:off x="3805394" y="5653455"/>
-            <a:ext cx="4419600" cy="444500"/>
-          </a:xfrm>
-          <a:prstGeom prst="rect">
-            <a:avLst/>
-          </a:prstGeom>
-          <a:noFill/>
-        </p:spPr>
-        <p:txBody>
-          <a:bodyPr wrap="square" rtlCol="0">
-            <a:noAutofit/>
-          </a:bodyPr>
-          <a:lstStyle/>
-          <a:p>
-            <a:pPr algn="ctr"/>
-            <a:r>
-              <a:rPr lang="ru-RU" dirty="0"/>
-              <a:t> </a:t>
-            </a:r>
-            <a:r>
-              <a:rPr lang="en-US" dirty="0"/>
-              <a:t>hex </a:t>
-            </a:r>
-            <a:r>
-              <a:rPr lang="ru-RU" dirty="0"/>
-              <a:t>дамп </a:t>
-            </a:r>
-          </a:p>
-        </p:txBody>
-      </p:sp>
       <p:pic>
         <p:nvPicPr>
-          <p:cNvPr id="4" name="Рисунок 3">
-            <a:extLst>
-              <a:ext uri="{FF2B5EF4-FFF2-40B4-BE49-F238E27FC236}">
-                <a16:creationId xmlns:a16="http://schemas.microsoft.com/office/drawing/2014/main" id="{14919785-3D1B-952D-9933-69D8F4B2F58A}"/>
-              </a:ext>
-            </a:extLst>
-          </p:cNvPr>
+          <p:cNvPr id="3" name="Изображение 2"/>
           <p:cNvPicPr>
             <a:picLocks noChangeAspect="1"/>
           </p:cNvPicPr>
@@ -4576,95 +4349,17 @@
         </p:blipFill>
         <p:spPr>
           <a:xfrm>
-            <a:off x="3159257" y="713875"/>
-            <a:ext cx="5873485" cy="4859520"/>
+            <a:off x="4498340" y="2429510"/>
+            <a:ext cx="3195320" cy="1998345"/>
           </a:xfrm>
           <a:prstGeom prst="rect">
             <a:avLst/>
           </a:prstGeom>
         </p:spPr>
       </p:pic>
-    </p:spTree>
-  </p:cSld>
-  <p:clrMapOvr>
-    <a:masterClrMapping/>
-  </p:clrMapOvr>
-</p:sld>
-</file>
-
-<file path=ppt/slides/slide7.xml><?xml version="1.0" encoding="utf-8"?>
-<p:sld xmlns:a="http://schemas.openxmlformats.org/drawingml/2006/main" xmlns:r="http://schemas.openxmlformats.org/officeDocument/2006/relationships" xmlns:p="http://schemas.openxmlformats.org/presentationml/2006/main">
-  <p:cSld>
-    <p:spTree>
-      <p:nvGrpSpPr>
-        <p:cNvPr id="1" name=""/>
-        <p:cNvGrpSpPr/>
-        <p:nvPr/>
-      </p:nvGrpSpPr>
-      <p:grpSpPr>
-        <a:xfrm>
-          <a:off x="0" y="0"/>
-          <a:ext cx="0" cy="0"/>
-          <a:chOff x="0" y="0"/>
-          <a:chExt cx="0" cy="0"/>
-        </a:xfrm>
-      </p:grpSpPr>
-      <p:sp>
-        <p:nvSpPr>
-          <p:cNvPr id="2" name="Заголовок 1"/>
-          <p:cNvSpPr>
-            <a:spLocks noGrp="1"/>
-          </p:cNvSpPr>
-          <p:nvPr>
-            <p:ph type="ctrTitle"/>
-          </p:nvPr>
-        </p:nvSpPr>
-        <p:spPr>
-          <a:xfrm>
-            <a:off x="0" y="-124069"/>
-            <a:ext cx="4048125" cy="1015375"/>
-          </a:xfrm>
-        </p:spPr>
-        <p:txBody>
-          <a:bodyPr>
-            <a:normAutofit/>
-          </a:bodyPr>
-          <a:lstStyle/>
-          <a:p>
-            <a:r>
-              <a:rPr lang="ru-RU" sz="3200" b="1"/>
-              <a:t>Декомпилирование </a:t>
-            </a:r>
-            <a:endParaRPr lang="ru-RU" sz="3200" b="1" dirty="0"/>
-          </a:p>
-        </p:txBody>
-      </p:sp>
-      <p:sp>
-        <p:nvSpPr>
-          <p:cNvPr id="6" name="Номер слайда 5"/>
-          <p:cNvSpPr>
-            <a:spLocks noGrp="1"/>
-          </p:cNvSpPr>
-          <p:nvPr>
-            <p:ph type="sldNum" sz="quarter" idx="12"/>
-          </p:nvPr>
-        </p:nvSpPr>
-        <p:spPr/>
-        <p:txBody>
-          <a:bodyPr/>
-          <a:lstStyle/>
-          <a:p>
-            <a:fld id="{B19B0651-EE4F-4900-A07F-96A6BFA9D0F0}" type="slidenum">
-              <a:rPr lang="ru-RU" smtClean="0"/>
-              <a:t>7</a:t>
-            </a:fld>
-            <a:endParaRPr lang="ru-RU" dirty="0"/>
-          </a:p>
-        </p:txBody>
-      </p:sp>
-      <p:sp>
-        <p:nvSpPr>
-          <p:cNvPr id="8" name="TextBox 7"/>
+      <p:sp>
+        <p:nvSpPr>
+          <p:cNvPr id="4" name="TextBox 7"/>
           <p:cNvSpPr txBox="1"/>
           <p:nvPr>
             <p:custDataLst>
@@ -4674,8 +4369,8 @@
         </p:nvSpPr>
         <p:spPr>
           <a:xfrm>
-            <a:off x="3886200" y="5969000"/>
-            <a:ext cx="4419600" cy="444500"/>
+            <a:off x="3790631" y="4667552"/>
+            <a:ext cx="4610735" cy="654685"/>
           </a:xfrm>
           <a:prstGeom prst="rect">
             <a:avLst/>
@@ -4691,21 +4386,37 @@
             <a:pPr algn="ctr"/>
             <a:r>
               <a:rPr lang="ru-RU" dirty="0"/>
-              <a:t> Декомпилирование </a:t>
+              <a:t>Запуск</a:t>
             </a:r>
             <a:r>
               <a:rPr lang="en-US" dirty="0"/>
-              <a:t>main</a:t>
+              <a:t> </a:t>
+            </a:r>
+            <a:r>
+              <a:rPr lang="ru-RU" dirty="0" err="1"/>
+              <a:t>вос</a:t>
+            </a:r>
+            <a:r>
+              <a:rPr lang="en-US" dirty="0"/>
+              <a:t>c</a:t>
+            </a:r>
+            <a:r>
+              <a:rPr lang="ru-RU" dirty="0" err="1"/>
+              <a:t>тановленного</a:t>
+            </a:r>
+            <a:r>
+              <a:rPr lang="ru-RU" dirty="0"/>
+              <a:t> кода</a:t>
             </a:r>
           </a:p>
         </p:txBody>
       </p:sp>
       <p:pic>
         <p:nvPicPr>
-          <p:cNvPr id="5" name="Рисунок 4">
+          <p:cNvPr id="7" name="Рисунок 6">
             <a:extLst>
               <a:ext uri="{FF2B5EF4-FFF2-40B4-BE49-F238E27FC236}">
-                <a16:creationId xmlns:a16="http://schemas.microsoft.com/office/drawing/2014/main" id="{C5FF5224-7A3A-EB5F-F349-FEBF0095C0D4}"/>
+                <a16:creationId xmlns:a16="http://schemas.microsoft.com/office/drawing/2014/main" id="{26A734D2-5905-FA9E-9B1B-50141942CF57}"/>
               </a:ext>
             </a:extLst>
           </p:cNvPr>
@@ -4715,323 +4426,15 @@
           <p:nvPr/>
         </p:nvPicPr>
         <p:blipFill>
-          <a:blip r:embed="rId3"/>
+          <a:blip r:embed="rId4"/>
           <a:stretch>
             <a:fillRect/>
           </a:stretch>
         </p:blipFill>
         <p:spPr>
           <a:xfrm>
-            <a:off x="2157191" y="1899823"/>
-            <a:ext cx="7877617" cy="2781038"/>
-          </a:xfrm>
-          <a:prstGeom prst="rect">
-            <a:avLst/>
-          </a:prstGeom>
-        </p:spPr>
-      </p:pic>
-    </p:spTree>
-  </p:cSld>
-  <p:clrMapOvr>
-    <a:masterClrMapping/>
-  </p:clrMapOvr>
-</p:sld>
-</file>
-
-<file path=ppt/slides/slide8.xml><?xml version="1.0" encoding="utf-8"?>
-<p:sld xmlns:a="http://schemas.openxmlformats.org/drawingml/2006/main" xmlns:r="http://schemas.openxmlformats.org/officeDocument/2006/relationships" xmlns:p="http://schemas.openxmlformats.org/presentationml/2006/main">
-  <p:cSld>
-    <p:spTree>
-      <p:nvGrpSpPr>
-        <p:cNvPr id="1" name=""/>
-        <p:cNvGrpSpPr/>
-        <p:nvPr/>
-      </p:nvGrpSpPr>
-      <p:grpSpPr>
-        <a:xfrm>
-          <a:off x="0" y="0"/>
-          <a:ext cx="0" cy="0"/>
-          <a:chOff x="0" y="0"/>
-          <a:chExt cx="0" cy="0"/>
-        </a:xfrm>
-      </p:grpSpPr>
-      <p:sp>
-        <p:nvSpPr>
-          <p:cNvPr id="2" name="Заголовок 1"/>
-          <p:cNvSpPr>
-            <a:spLocks noGrp="1"/>
-          </p:cNvSpPr>
-          <p:nvPr>
-            <p:ph type="ctrTitle"/>
-          </p:nvPr>
-        </p:nvSpPr>
-        <p:spPr>
-          <a:xfrm>
-            <a:off x="0" y="-124069"/>
-            <a:ext cx="4048125" cy="1015375"/>
-          </a:xfrm>
-        </p:spPr>
-        <p:txBody>
-          <a:bodyPr>
-            <a:normAutofit/>
-          </a:bodyPr>
-          <a:lstStyle/>
-          <a:p>
-            <a:r>
-              <a:rPr lang="ru-RU" sz="3200" b="1" dirty="0"/>
-              <a:t>Декомпилирование </a:t>
-            </a:r>
-          </a:p>
-        </p:txBody>
-      </p:sp>
-      <p:sp>
-        <p:nvSpPr>
-          <p:cNvPr id="6" name="Номер слайда 5"/>
-          <p:cNvSpPr>
-            <a:spLocks noGrp="1"/>
-          </p:cNvSpPr>
-          <p:nvPr>
-            <p:ph type="sldNum" sz="quarter" idx="12"/>
-          </p:nvPr>
-        </p:nvSpPr>
-        <p:spPr/>
-        <p:txBody>
-          <a:bodyPr/>
-          <a:lstStyle/>
-          <a:p>
-            <a:fld id="{B19B0651-EE4F-4900-A07F-96A6BFA9D0F0}" type="slidenum">
-              <a:rPr lang="ru-RU" smtClean="0"/>
-              <a:t>8</a:t>
-            </a:fld>
-            <a:endParaRPr lang="ru-RU" dirty="0"/>
-          </a:p>
-        </p:txBody>
-      </p:sp>
-      <p:sp>
-        <p:nvSpPr>
-          <p:cNvPr id="8" name="TextBox 7"/>
-          <p:cNvSpPr txBox="1"/>
-          <p:nvPr>
-            <p:custDataLst>
-              <p:tags r:id="rId1"/>
-            </p:custDataLst>
-          </p:nvPr>
-        </p:nvSpPr>
-        <p:spPr>
-          <a:xfrm>
-            <a:off x="3790315" y="5122545"/>
-            <a:ext cx="4610735" cy="654685"/>
-          </a:xfrm>
-          <a:prstGeom prst="rect">
-            <a:avLst/>
-          </a:prstGeom>
-          <a:noFill/>
-        </p:spPr>
-        <p:txBody>
-          <a:bodyPr wrap="square" rtlCol="0">
-            <a:noAutofit/>
-          </a:bodyPr>
-          <a:lstStyle/>
-          <a:p>
-            <a:pPr algn="ctr"/>
-            <a:r>
-              <a:rPr lang="ru-RU" dirty="0"/>
-              <a:t>Декомпилирование </a:t>
-            </a:r>
-          </a:p>
-          <a:p>
-            <a:pPr algn="ctr"/>
-            <a:r>
-              <a:rPr lang="ru-RU" altLang="en-US" dirty="0"/>
-              <a:t>функции </a:t>
-            </a:r>
-            <a:r>
-              <a:rPr lang="en-US" altLang="en-US" dirty="0" err="1"/>
-              <a:t>swprintf</a:t>
-            </a:r>
-            <a:endParaRPr lang="en-US" altLang="en-US" dirty="0"/>
-          </a:p>
-        </p:txBody>
-      </p:sp>
-      <p:pic>
-        <p:nvPicPr>
-          <p:cNvPr id="5" name="Рисунок 4">
-            <a:extLst>
-              <a:ext uri="{FF2B5EF4-FFF2-40B4-BE49-F238E27FC236}">
-                <a16:creationId xmlns:a16="http://schemas.microsoft.com/office/drawing/2014/main" id="{4459813B-ED46-24A5-47FD-7F663381EC3C}"/>
-              </a:ext>
-            </a:extLst>
-          </p:cNvPr>
-          <p:cNvPicPr>
-            <a:picLocks noChangeAspect="1"/>
-          </p:cNvPicPr>
-          <p:nvPr/>
-        </p:nvPicPr>
-        <p:blipFill>
-          <a:blip r:embed="rId3"/>
-          <a:stretch>
-            <a:fillRect/>
-          </a:stretch>
-        </p:blipFill>
-        <p:spPr>
-          <a:xfrm>
-            <a:off x="1147072" y="2090550"/>
-            <a:ext cx="9897856" cy="2676899"/>
-          </a:xfrm>
-          <a:prstGeom prst="rect">
-            <a:avLst/>
-          </a:prstGeom>
-        </p:spPr>
-      </p:pic>
-    </p:spTree>
-  </p:cSld>
-  <p:clrMapOvr>
-    <a:masterClrMapping/>
-  </p:clrMapOvr>
-</p:sld>
-</file>
-
-<file path=ppt/slides/slide9.xml><?xml version="1.0" encoding="utf-8"?>
-<p:sld xmlns:a="http://schemas.openxmlformats.org/drawingml/2006/main" xmlns:r="http://schemas.openxmlformats.org/officeDocument/2006/relationships" xmlns:p="http://schemas.openxmlformats.org/presentationml/2006/main">
-  <p:cSld>
-    <p:spTree>
-      <p:nvGrpSpPr>
-        <p:cNvPr id="1" name=""/>
-        <p:cNvGrpSpPr/>
-        <p:nvPr/>
-      </p:nvGrpSpPr>
-      <p:grpSpPr>
-        <a:xfrm>
-          <a:off x="0" y="0"/>
-          <a:ext cx="0" cy="0"/>
-          <a:chOff x="0" y="0"/>
-          <a:chExt cx="0" cy="0"/>
-        </a:xfrm>
-      </p:grpSpPr>
-      <p:sp>
-        <p:nvSpPr>
-          <p:cNvPr id="2" name="Заголовок 1"/>
-          <p:cNvSpPr>
-            <a:spLocks noGrp="1"/>
-          </p:cNvSpPr>
-          <p:nvPr>
-            <p:ph type="ctrTitle"/>
-          </p:nvPr>
-        </p:nvSpPr>
-        <p:spPr>
-          <a:xfrm>
-            <a:off x="-220345" y="154061"/>
-            <a:ext cx="4048125" cy="1015375"/>
-          </a:xfrm>
-        </p:spPr>
-        <p:txBody>
-          <a:bodyPr>
-            <a:normAutofit fontScale="90000"/>
-          </a:bodyPr>
-          <a:lstStyle/>
-          <a:p>
-            <a:r>
-              <a:rPr lang="ru-RU" sz="3200" b="1" dirty="0"/>
-              <a:t>Восстановленный код</a:t>
-            </a:r>
-            <a:br>
-              <a:rPr lang="ru-RU" sz="3200" b="1" dirty="0"/>
-            </a:br>
-            <a:r>
-              <a:rPr lang="ru-RU" sz="3200" b="1" dirty="0"/>
-              <a:t>программы </a:t>
-            </a:r>
-          </a:p>
-        </p:txBody>
-      </p:sp>
-      <p:sp>
-        <p:nvSpPr>
-          <p:cNvPr id="6" name="Номер слайда 5"/>
-          <p:cNvSpPr>
-            <a:spLocks noGrp="1"/>
-          </p:cNvSpPr>
-          <p:nvPr>
-            <p:ph type="sldNum" sz="quarter" idx="12"/>
-          </p:nvPr>
-        </p:nvSpPr>
-        <p:spPr/>
-        <p:txBody>
-          <a:bodyPr/>
-          <a:lstStyle/>
-          <a:p>
-            <a:fld id="{B19B0651-EE4F-4900-A07F-96A6BFA9D0F0}" type="slidenum">
-              <a:rPr lang="ru-RU" smtClean="0"/>
-              <a:t>9</a:t>
-            </a:fld>
-            <a:endParaRPr lang="ru-RU" dirty="0"/>
-          </a:p>
-        </p:txBody>
-      </p:sp>
-      <p:sp>
-        <p:nvSpPr>
-          <p:cNvPr id="11" name="TextBox 7"/>
-          <p:cNvSpPr txBox="1"/>
-          <p:nvPr>
-            <p:custDataLst>
-              <p:tags r:id="rId1"/>
-            </p:custDataLst>
-          </p:nvPr>
-        </p:nvSpPr>
-        <p:spPr>
-          <a:xfrm>
-            <a:off x="637540" y="3274060"/>
-            <a:ext cx="4610735" cy="654685"/>
-          </a:xfrm>
-          <a:prstGeom prst="rect">
-            <a:avLst/>
-          </a:prstGeom>
-          <a:noFill/>
-        </p:spPr>
-        <p:txBody>
-          <a:bodyPr wrap="square" rtlCol="0">
-            <a:noAutofit/>
-          </a:bodyPr>
-          <a:lstStyle/>
-          <a:p>
-            <a:pPr algn="ctr"/>
-            <a:r>
-              <a:rPr lang="ru-RU" dirty="0"/>
-              <a:t> Восстановленный </a:t>
-            </a:r>
-          </a:p>
-          <a:p>
-            <a:pPr algn="ctr"/>
-            <a:r>
-              <a:rPr lang="ru-RU" dirty="0"/>
-              <a:t>изначальный код</a:t>
-            </a:r>
-          </a:p>
-        </p:txBody>
-      </p:sp>
-      <p:pic>
-        <p:nvPicPr>
-          <p:cNvPr id="8" name="Рисунок 7">
-            <a:extLst>
-              <a:ext uri="{FF2B5EF4-FFF2-40B4-BE49-F238E27FC236}">
-                <a16:creationId xmlns:a16="http://schemas.microsoft.com/office/drawing/2014/main" id="{870205B8-2166-25F7-96BD-BC8397A29C7A}"/>
-              </a:ext>
-            </a:extLst>
-          </p:cNvPr>
-          <p:cNvPicPr>
-            <a:picLocks noChangeAspect="1"/>
-          </p:cNvPicPr>
-          <p:nvPr/>
-        </p:nvPicPr>
-        <p:blipFill>
-          <a:blip r:embed="rId3"/>
-          <a:stretch>
-            <a:fillRect/>
-          </a:stretch>
-        </p:blipFill>
-        <p:spPr>
-          <a:xfrm>
-            <a:off x="4889699" y="136525"/>
-            <a:ext cx="3833759" cy="6467383"/>
+            <a:off x="4519392" y="2400156"/>
+            <a:ext cx="3153215" cy="2057687"/>
           </a:xfrm>
           <a:prstGeom prst="rect">
             <a:avLst/>
@@ -5059,24 +4462,6 @@
 </file>
 
 <file path=ppt/tags/tag3.xml><?xml version="1.0" encoding="utf-8"?>
-<p:tagLst xmlns:a="http://schemas.openxmlformats.org/drawingml/2006/main" xmlns:r="http://schemas.openxmlformats.org/officeDocument/2006/relationships" xmlns:p="http://schemas.openxmlformats.org/presentationml/2006/main">
-  <p:tag name="KSO_WM_DIAGRAM_VIRTUALLY_FRAME" val="{&quot;height&quot;:362.45,&quot;left&quot;:6.8,&quot;top&quot;:142.55,&quot;width&quot;:923.05}"/>
-</p:tagLst>
-</file>
-
-<file path=ppt/tags/tag4.xml><?xml version="1.0" encoding="utf-8"?>
-<p:tagLst xmlns:a="http://schemas.openxmlformats.org/drawingml/2006/main" xmlns:r="http://schemas.openxmlformats.org/officeDocument/2006/relationships" xmlns:p="http://schemas.openxmlformats.org/presentationml/2006/main">
-  <p:tag name="KSO_WM_DIAGRAM_VIRTUALLY_FRAME" val="{&quot;height&quot;:362.45,&quot;left&quot;:6.8,&quot;top&quot;:142.55,&quot;width&quot;:923.05}"/>
-</p:tagLst>
-</file>
-
-<file path=ppt/tags/tag5.xml><?xml version="1.0" encoding="utf-8"?>
-<p:tagLst xmlns:a="http://schemas.openxmlformats.org/drawingml/2006/main" xmlns:r="http://schemas.openxmlformats.org/officeDocument/2006/relationships" xmlns:p="http://schemas.openxmlformats.org/presentationml/2006/main">
-  <p:tag name="KSO_WM_DIAGRAM_VIRTUALLY_FRAME" val="{&quot;height&quot;:362.45,&quot;left&quot;:6.8,&quot;top&quot;:142.55,&quot;width&quot;:923.05}"/>
-</p:tagLst>
-</file>
-
-<file path=ppt/tags/tag6.xml><?xml version="1.0" encoding="utf-8"?>
 <p:tagLst xmlns:a="http://schemas.openxmlformats.org/drawingml/2006/main" xmlns:r="http://schemas.openxmlformats.org/officeDocument/2006/relationships" xmlns:p="http://schemas.openxmlformats.org/presentationml/2006/main">
   <p:tag name="KSO_WM_DIAGRAM_VIRTUALLY_FRAME" val="{&quot;height&quot;:362.45,&quot;left&quot;:6.8,&quot;top&quot;:142.55,&quot;width&quot;:923.05}"/>
 </p:tagLst>
